--- a/classes/parte-2-deep-learning/112-transfer-learning-unsupervised-pretraining/clase-112-transfer-learning-unsupervised-pretraining-presentacion.pptx
+++ b/classes/parte-2-deep-learning/112-transfer-learning-unsupervised-pretraining/clase-112-transfer-learning-unsupervised-pretraining-presentacion.pptx
@@ -4801,7 +4801,7 @@
                 </a:solidFill>
                 <a:latin typeface="Segoe UI"/>
               </a:rPr>
-              <a:t>Primer bloque ejecutable del notebook.</a:t>
+              <a:t>include_top=False descarta la cabeza de clasificación de ImageNet; trainable=False la congela.</a:t>
             </a:r>
           </a:p>
         </p:txBody>
@@ -4888,7 +4888,159 @@
                 </a:solidFill>
                 <a:latin typeface="Courier New"/>
               </a:rPr>
-              <a:t># Imports y configuración inicial</a:t>
+              <a:t>import numpy as np</a:t>
+            </a:r>
+          </a:p>
+          <a:p>
+            <a:pPr>
+              <a:defRPr sz="1200" b="0">
+                <a:solidFill>
+                  <a:srgbClr val="F8FAFC"/>
+                </a:solidFill>
+                <a:latin typeface="Courier New"/>
+              </a:defRPr>
+            </a:pPr>
+            <a:r>
+              <a:rPr sz="1200" b="0">
+                <a:solidFill>
+                  <a:srgbClr val="F8FAFC"/>
+                </a:solidFill>
+                <a:latin typeface="Courier New"/>
+              </a:rPr>
+              <a:t>from tensorflow import keras</a:t>
+            </a:r>
+          </a:p>
+          <a:p>
+            <a:pPr>
+              <a:defRPr sz="1200" b="0">
+                <a:solidFill>
+                  <a:srgbClr val="F8FAFC"/>
+                </a:solidFill>
+                <a:latin typeface="Courier New"/>
+              </a:defRPr>
+            </a:pPr>
+            <a:r>
+              <a:rPr sz="1200" b="0">
+                <a:solidFill>
+                  <a:srgbClr val="F8FAFC"/>
+                </a:solidFill>
+                <a:latin typeface="Courier New"/>
+              </a:rPr>
+              <a:t>from tensorflow.keras import layers</a:t>
+            </a:r>
+          </a:p>
+          <a:p>
+            <a:pPr>
+              <a:defRPr sz="1200" b="0">
+                <a:solidFill>
+                  <a:srgbClr val="F8FAFC"/>
+                </a:solidFill>
+                <a:latin typeface="Courier New"/>
+              </a:defRPr>
+            </a:pPr>
+            <a:r>
+              <a:rPr sz="1200" b="0">
+                <a:solidFill>
+                  <a:srgbClr val="F8FAFC"/>
+                </a:solidFill>
+                <a:latin typeface="Courier New"/>
+              </a:rPr>
+              <a:t>keras.utils.set_random_seed(42)</a:t>
+            </a:r>
+          </a:p>
+          <a:p>
+            <a:pPr>
+              <a:defRPr sz="1200" b="0">
+                <a:solidFill>
+                  <a:srgbClr val="F8FAFC"/>
+                </a:solidFill>
+                <a:latin typeface="Courier New"/>
+              </a:defRPr>
+            </a:pPr>
+            <a:r>
+              <a:rPr sz="1200" b="0">
+                <a:solidFill>
+                  <a:srgbClr val="F8FAFC"/>
+                </a:solidFill>
+                <a:latin typeface="Courier New"/>
+              </a:rPr>
+              <a:t> </a:t>
+            </a:r>
+          </a:p>
+          <a:p>
+            <a:pPr>
+              <a:defRPr sz="1200" b="0">
+                <a:solidFill>
+                  <a:srgbClr val="F8FAFC"/>
+                </a:solidFill>
+                <a:latin typeface="Courier New"/>
+              </a:defRPr>
+            </a:pPr>
+            <a:r>
+              <a:rPr sz="1200" b="0">
+                <a:solidFill>
+                  <a:srgbClr val="F8FAFC"/>
+                </a:solidFill>
+                <a:latin typeface="Courier New"/>
+              </a:rPr>
+              <a:t>base = keras.applications.MobileNetV3Small(</a:t>
+            </a:r>
+          </a:p>
+          <a:p>
+            <a:pPr>
+              <a:defRPr sz="1200" b="0">
+                <a:solidFill>
+                  <a:srgbClr val="F8FAFC"/>
+                </a:solidFill>
+                <a:latin typeface="Courier New"/>
+              </a:defRPr>
+            </a:pPr>
+            <a:r>
+              <a:rPr sz="1200" b="0">
+                <a:solidFill>
+                  <a:srgbClr val="F8FAFC"/>
+                </a:solidFill>
+                <a:latin typeface="Courier New"/>
+              </a:rPr>
+              <a:t>    weights="imagenet", include_top=False, input_shape=(224, 224, 3))</a:t>
+            </a:r>
+          </a:p>
+          <a:p>
+            <a:pPr>
+              <a:defRPr sz="1200" b="0">
+                <a:solidFill>
+                  <a:srgbClr val="F8FAFC"/>
+                </a:solidFill>
+                <a:latin typeface="Courier New"/>
+              </a:defRPr>
+            </a:pPr>
+            <a:r>
+              <a:rPr sz="1200" b="0">
+                <a:solidFill>
+                  <a:srgbClr val="F8FAFC"/>
+                </a:solidFill>
+                <a:latin typeface="Courier New"/>
+              </a:rPr>
+              <a:t>base.trainable = False</a:t>
+            </a:r>
+          </a:p>
+          <a:p>
+            <a:pPr>
+              <a:defRPr sz="1200" b="0">
+                <a:solidFill>
+                  <a:srgbClr val="F8FAFC"/>
+                </a:solidFill>
+                <a:latin typeface="Courier New"/>
+              </a:defRPr>
+            </a:pPr>
+            <a:r>
+              <a:rPr sz="1200" b="0">
+                <a:solidFill>
+                  <a:srgbClr val="F8FAFC"/>
+                </a:solidFill>
+                <a:latin typeface="Courier New"/>
+              </a:rPr>
+              <a:t>print("capas de la base:", len(base.layers), "| base.trainable:", base.trainable)</a:t>
             </a:r>
           </a:p>
         </p:txBody>

--- a/classes/parte-2-deep-learning/112-transfer-learning-unsupervised-pretraining/clase-112-transfer-learning-unsupervised-pretraining-presentacion.pptx
+++ b/classes/parte-2-deep-learning/112-transfer-learning-unsupervised-pretraining/clase-112-transfer-learning-unsupervised-pretraining-presentacion.pptx
@@ -3272,7 +3272,7 @@
                 </a:solidFill>
                 <a:latin typeface="Segoe UI"/>
               </a:rPr>
-              <a:t>Parte: 2 — Deep Learning · Fuente: Géron, cap. 11 § Reusing Pretrained Layers.  Duración estimada: 70 min.</a:t>
+              <a:t>Parte: 2 — Deep Learning · Fuente: Géron, cap. 11 § Reusing Pretrained Layers.  Duración estimada: 70 min. · Nivel: Avanzado</a:t>
             </a:r>
           </a:p>
         </p:txBody>
@@ -3581,7 +3581,7 @@
                 </a:solidFill>
                 <a:latin typeface="Segoe UI"/>
               </a:rPr>
-              <a:t>Parte: 2 — Deep Learning · Fuente: Géron, cap. 11 § Reusing Pretrained Layers.  Duración estimada: 70 min.</a:t>
+              <a:t>Parte: 2 — Deep Learning · Fuente: Géron, cap. 11 § Reusing Pretrained Layers.  Duración estimada: 70 min. · Nivel: Avanzado</a:t>
             </a:r>
           </a:p>
         </p:txBody>
